--- a/docs/slides/Group14_INS3044_Cartesian.pptx
+++ b/docs/slides/Group14_INS3044_Cartesian.pptx
@@ -6593,7 +6593,7 @@
         <p:spPr>
           <a:xfrm>
             <a:off x="640080" y="402336"/>
-            <a:ext cx="10972800" cy="713232"/>
+            <a:ext cx="10972800" cy="467820"/>
           </a:xfrm>
           <a:prstGeom prst="rect">
             <a:avLst/>
@@ -6612,13 +6612,31 @@
               </a:lnSpc>
             </a:pPr>
             <a:r>
-              <a:rPr sz="2800" b="1" i="0">
+              <a:rPr sz="2800" b="1" i="0" dirty="0">
                 <a:solidFill>
                   <a:srgbClr val="2B2419"/>
                 </a:solidFill>
                 <a:latin typeface="Playfair Display"/>
               </a:rPr>
-              <a:t>Gantt Chart — 14-Week Timeline</a:t>
+              <a:t>Gantt Chart — </a:t>
+            </a:r>
+            <a:r>
+              <a:rPr lang="en-US" sz="2800" b="1" dirty="0">
+                <a:solidFill>
+                  <a:srgbClr val="2B2419"/>
+                </a:solidFill>
+                <a:latin typeface="Playfair Display"/>
+              </a:rPr>
+              <a:t>8</a:t>
+            </a:r>
+            <a:r>
+              <a:rPr sz="2800" b="1" i="0" dirty="0">
+                <a:solidFill>
+                  <a:srgbClr val="2B2419"/>
+                </a:solidFill>
+                <a:latin typeface="Playfair Display"/>
+              </a:rPr>
+              <a:t>-Week Timeline</a:t>
             </a:r>
           </a:p>
         </p:txBody>
@@ -6778,13 +6796,15 @@
       <p:sp>
         <p:nvSpPr>
           <p:cNvPr id="9" name="Rectangle 8"/>
-          <p:cNvSpPr/>
+          <p:cNvSpPr>
+            <a:spLocks/>
+          </p:cNvSpPr>
           <p:nvPr/>
         </p:nvSpPr>
         <p:spPr>
           <a:xfrm>
             <a:off x="2148840" y="1133109"/>
-            <a:ext cx="667512" cy="310896"/>
+            <a:ext cx="1080000" cy="310896"/>
           </a:xfrm>
           <a:prstGeom prst="rect">
             <a:avLst/>
@@ -6818,46 +6838,25 @@
           <a:lstStyle/>
           <a:p>
             <a:pPr algn="ctr"/>
-            <a:endParaRPr/>
-          </a:p>
-        </p:txBody>
-      </p:sp>
-      <p:sp>
-        <p:nvSpPr>
-          <p:cNvPr id="10" name="TextBox 9"/>
-          <p:cNvSpPr txBox="1"/>
-          <p:nvPr/>
-        </p:nvSpPr>
-        <p:spPr>
-          <a:xfrm>
-            <a:off x="2148840" y="1133109"/>
-            <a:ext cx="667512" cy="310896"/>
-          </a:xfrm>
-          <a:prstGeom prst="rect">
-            <a:avLst/>
-          </a:prstGeom>
-          <a:noFill/>
-        </p:spPr>
-        <p:txBody>
-          <a:bodyPr wrap="square" lIns="54864" tIns="18288" rIns="54864" bIns="18288" anchor="t">
-            <a:spAutoFit/>
-          </a:bodyPr>
-          <a:lstStyle/>
-          <a:p>
-            <a:pPr algn="ctr">
-              <a:lnSpc>
-                <a:spcPct val="100000"/>
-              </a:lnSpc>
-            </a:pPr>
-            <a:r>
-              <a:rPr sz="800" b="1" i="0">
+            <a:r>
+              <a:rPr lang="en-US" dirty="0">
                 <a:solidFill>
-                  <a:srgbClr val="2B2419"/>
+                  <a:schemeClr val="tx1"/>
                 </a:solidFill>
-                <a:latin typeface="Inter"/>
+                <a:latin typeface="Iosevka NFM" panose="02000509030000000004" pitchFamily="49" charset="0"/>
+                <a:ea typeface="Iosevka NFM" panose="02000509030000000004" pitchFamily="49" charset="0"/>
+                <a:cs typeface="Iosevka NFM" panose="02000509030000000004" pitchFamily="49" charset="0"/>
               </a:rPr>
               <a:t>W1</a:t>
             </a:r>
+            <a:endParaRPr dirty="0">
+              <a:solidFill>
+                <a:schemeClr val="tx1"/>
+              </a:solidFill>
+              <a:latin typeface="Iosevka NFM" panose="02000509030000000004" pitchFamily="49" charset="0"/>
+              <a:ea typeface="Iosevka NFM" panose="02000509030000000004" pitchFamily="49" charset="0"/>
+              <a:cs typeface="Iosevka NFM" panose="02000509030000000004" pitchFamily="49" charset="0"/>
+            </a:endParaRPr>
           </a:p>
         </p:txBody>
       </p:sp>
@@ -6869,8 +6868,8 @@
         </p:nvSpPr>
         <p:spPr>
           <a:xfrm>
-            <a:off x="2843784" y="1133109"/>
-            <a:ext cx="667512" cy="310896"/>
+            <a:off x="3379217" y="1133109"/>
+            <a:ext cx="1080000" cy="310896"/>
           </a:xfrm>
           <a:prstGeom prst="rect">
             <a:avLst/>
@@ -6904,46 +6903,25 @@
           <a:lstStyle/>
           <a:p>
             <a:pPr algn="ctr"/>
-            <a:endParaRPr/>
-          </a:p>
-        </p:txBody>
-      </p:sp>
-      <p:sp>
-        <p:nvSpPr>
-          <p:cNvPr id="12" name="TextBox 11"/>
-          <p:cNvSpPr txBox="1"/>
-          <p:nvPr/>
-        </p:nvSpPr>
-        <p:spPr>
-          <a:xfrm>
-            <a:off x="2843784" y="1133109"/>
-            <a:ext cx="667512" cy="310896"/>
-          </a:xfrm>
-          <a:prstGeom prst="rect">
-            <a:avLst/>
-          </a:prstGeom>
-          <a:noFill/>
-        </p:spPr>
-        <p:txBody>
-          <a:bodyPr wrap="square" lIns="54864" tIns="18288" rIns="54864" bIns="18288" anchor="t">
-            <a:spAutoFit/>
-          </a:bodyPr>
-          <a:lstStyle/>
-          <a:p>
-            <a:pPr algn="ctr">
-              <a:lnSpc>
-                <a:spcPct val="100000"/>
-              </a:lnSpc>
-            </a:pPr>
-            <a:r>
-              <a:rPr sz="800" b="1" i="0">
+            <a:r>
+              <a:rPr lang="en-US" dirty="0">
                 <a:solidFill>
-                  <a:srgbClr val="2B2419"/>
+                  <a:schemeClr val="tx1"/>
                 </a:solidFill>
-                <a:latin typeface="Inter"/>
+                <a:latin typeface="Iosevka NFM" panose="02000509030000000004" pitchFamily="49" charset="0"/>
+                <a:ea typeface="Iosevka NFM" panose="02000509030000000004" pitchFamily="49" charset="0"/>
+                <a:cs typeface="Iosevka NFM" panose="02000509030000000004" pitchFamily="49" charset="0"/>
               </a:rPr>
               <a:t>W2</a:t>
             </a:r>
+            <a:endParaRPr dirty="0">
+              <a:solidFill>
+                <a:schemeClr val="tx1"/>
+              </a:solidFill>
+              <a:latin typeface="Iosevka NFM" panose="02000509030000000004" pitchFamily="49" charset="0"/>
+              <a:ea typeface="Iosevka NFM" panose="02000509030000000004" pitchFamily="49" charset="0"/>
+              <a:cs typeface="Iosevka NFM" panose="02000509030000000004" pitchFamily="49" charset="0"/>
+            </a:endParaRPr>
           </a:p>
         </p:txBody>
       </p:sp>
@@ -6955,8 +6933,8 @@
         </p:nvSpPr>
         <p:spPr>
           <a:xfrm>
-            <a:off x="3538728" y="1133109"/>
-            <a:ext cx="667512" cy="310896"/>
+            <a:off x="4609594" y="1133109"/>
+            <a:ext cx="1080000" cy="310896"/>
           </a:xfrm>
           <a:prstGeom prst="rect">
             <a:avLst/>
@@ -6990,46 +6968,25 @@
           <a:lstStyle/>
           <a:p>
             <a:pPr algn="ctr"/>
-            <a:endParaRPr/>
-          </a:p>
-        </p:txBody>
-      </p:sp>
-      <p:sp>
-        <p:nvSpPr>
-          <p:cNvPr id="14" name="TextBox 13"/>
-          <p:cNvSpPr txBox="1"/>
-          <p:nvPr/>
-        </p:nvSpPr>
-        <p:spPr>
-          <a:xfrm>
-            <a:off x="3538728" y="1133109"/>
-            <a:ext cx="667512" cy="310896"/>
-          </a:xfrm>
-          <a:prstGeom prst="rect">
-            <a:avLst/>
-          </a:prstGeom>
-          <a:noFill/>
-        </p:spPr>
-        <p:txBody>
-          <a:bodyPr wrap="square" lIns="54864" tIns="18288" rIns="54864" bIns="18288" anchor="t">
-            <a:spAutoFit/>
-          </a:bodyPr>
-          <a:lstStyle/>
-          <a:p>
-            <a:pPr algn="ctr">
-              <a:lnSpc>
-                <a:spcPct val="100000"/>
-              </a:lnSpc>
-            </a:pPr>
-            <a:r>
-              <a:rPr sz="800" b="1" i="0">
+            <a:r>
+              <a:rPr lang="en-US" dirty="0">
                 <a:solidFill>
-                  <a:srgbClr val="2B2419"/>
+                  <a:schemeClr val="tx1"/>
                 </a:solidFill>
-                <a:latin typeface="Inter"/>
+                <a:latin typeface="Iosevka NFM" panose="02000509030000000004" pitchFamily="49" charset="0"/>
+                <a:ea typeface="Iosevka NFM" panose="02000509030000000004" pitchFamily="49" charset="0"/>
+                <a:cs typeface="Iosevka NFM" panose="02000509030000000004" pitchFamily="49" charset="0"/>
               </a:rPr>
               <a:t>W3</a:t>
             </a:r>
+            <a:endParaRPr dirty="0">
+              <a:solidFill>
+                <a:schemeClr val="tx1"/>
+              </a:solidFill>
+              <a:latin typeface="Iosevka NFM" panose="02000509030000000004" pitchFamily="49" charset="0"/>
+              <a:ea typeface="Iosevka NFM" panose="02000509030000000004" pitchFamily="49" charset="0"/>
+              <a:cs typeface="Iosevka NFM" panose="02000509030000000004" pitchFamily="49" charset="0"/>
+            </a:endParaRPr>
           </a:p>
         </p:txBody>
       </p:sp>
@@ -7041,8 +6998,8 @@
         </p:nvSpPr>
         <p:spPr>
           <a:xfrm>
-            <a:off x="4233672" y="1133109"/>
-            <a:ext cx="667512" cy="310896"/>
+            <a:off x="5839971" y="1133109"/>
+            <a:ext cx="1080000" cy="310896"/>
           </a:xfrm>
           <a:prstGeom prst="rect">
             <a:avLst/>
@@ -7076,46 +7033,25 @@
           <a:lstStyle/>
           <a:p>
             <a:pPr algn="ctr"/>
-            <a:endParaRPr/>
-          </a:p>
-        </p:txBody>
-      </p:sp>
-      <p:sp>
-        <p:nvSpPr>
-          <p:cNvPr id="16" name="TextBox 15"/>
-          <p:cNvSpPr txBox="1"/>
-          <p:nvPr/>
-        </p:nvSpPr>
-        <p:spPr>
-          <a:xfrm>
-            <a:off x="4233672" y="1133109"/>
-            <a:ext cx="667512" cy="310896"/>
-          </a:xfrm>
-          <a:prstGeom prst="rect">
-            <a:avLst/>
-          </a:prstGeom>
-          <a:noFill/>
-        </p:spPr>
-        <p:txBody>
-          <a:bodyPr wrap="square" lIns="54864" tIns="18288" rIns="54864" bIns="18288" anchor="t">
-            <a:spAutoFit/>
-          </a:bodyPr>
-          <a:lstStyle/>
-          <a:p>
-            <a:pPr algn="ctr">
-              <a:lnSpc>
-                <a:spcPct val="100000"/>
-              </a:lnSpc>
-            </a:pPr>
-            <a:r>
-              <a:rPr sz="800" b="1" i="0">
+            <a:r>
+              <a:rPr lang="en-US" dirty="0">
                 <a:solidFill>
-                  <a:srgbClr val="2B2419"/>
+                  <a:schemeClr val="tx1"/>
                 </a:solidFill>
-                <a:latin typeface="Inter"/>
+                <a:latin typeface="Iosevka NFM" panose="02000509030000000004" pitchFamily="49" charset="0"/>
+                <a:ea typeface="Iosevka NFM" panose="02000509030000000004" pitchFamily="49" charset="0"/>
+                <a:cs typeface="Iosevka NFM" panose="02000509030000000004" pitchFamily="49" charset="0"/>
               </a:rPr>
               <a:t>W4</a:t>
             </a:r>
+            <a:endParaRPr dirty="0">
+              <a:solidFill>
+                <a:schemeClr val="tx1"/>
+              </a:solidFill>
+              <a:latin typeface="Iosevka NFM" panose="02000509030000000004" pitchFamily="49" charset="0"/>
+              <a:ea typeface="Iosevka NFM" panose="02000509030000000004" pitchFamily="49" charset="0"/>
+              <a:cs typeface="Iosevka NFM" panose="02000509030000000004" pitchFamily="49" charset="0"/>
+            </a:endParaRPr>
           </a:p>
         </p:txBody>
       </p:sp>
@@ -7127,8 +7063,8 @@
         </p:nvSpPr>
         <p:spPr>
           <a:xfrm>
-            <a:off x="4928616" y="1133109"/>
-            <a:ext cx="667512" cy="310896"/>
+            <a:off x="7070348" y="1133109"/>
+            <a:ext cx="1080000" cy="310896"/>
           </a:xfrm>
           <a:prstGeom prst="rect">
             <a:avLst/>
@@ -7162,46 +7098,25 @@
           <a:lstStyle/>
           <a:p>
             <a:pPr algn="ctr"/>
-            <a:endParaRPr/>
-          </a:p>
-        </p:txBody>
-      </p:sp>
-      <p:sp>
-        <p:nvSpPr>
-          <p:cNvPr id="18" name="TextBox 17"/>
-          <p:cNvSpPr txBox="1"/>
-          <p:nvPr/>
-        </p:nvSpPr>
-        <p:spPr>
-          <a:xfrm>
-            <a:off x="4928616" y="1133109"/>
-            <a:ext cx="667512" cy="310896"/>
-          </a:xfrm>
-          <a:prstGeom prst="rect">
-            <a:avLst/>
-          </a:prstGeom>
-          <a:noFill/>
-        </p:spPr>
-        <p:txBody>
-          <a:bodyPr wrap="square" lIns="54864" tIns="18288" rIns="54864" bIns="18288" anchor="t">
-            <a:spAutoFit/>
-          </a:bodyPr>
-          <a:lstStyle/>
-          <a:p>
-            <a:pPr algn="ctr">
-              <a:lnSpc>
-                <a:spcPct val="100000"/>
-              </a:lnSpc>
-            </a:pPr>
-            <a:r>
-              <a:rPr sz="800" b="1" i="0">
+            <a:r>
+              <a:rPr lang="en-US" dirty="0">
                 <a:solidFill>
-                  <a:srgbClr val="2B2419"/>
+                  <a:schemeClr val="tx1"/>
                 </a:solidFill>
-                <a:latin typeface="Inter"/>
+                <a:latin typeface="Iosevka NFM" panose="02000509030000000004" pitchFamily="49" charset="0"/>
+                <a:ea typeface="Iosevka NFM" panose="02000509030000000004" pitchFamily="49" charset="0"/>
+                <a:cs typeface="Iosevka NFM" panose="02000509030000000004" pitchFamily="49" charset="0"/>
               </a:rPr>
               <a:t>W5</a:t>
             </a:r>
+            <a:endParaRPr dirty="0">
+              <a:solidFill>
+                <a:schemeClr val="tx1"/>
+              </a:solidFill>
+              <a:latin typeface="Iosevka NFM" panose="02000509030000000004" pitchFamily="49" charset="0"/>
+              <a:ea typeface="Iosevka NFM" panose="02000509030000000004" pitchFamily="49" charset="0"/>
+              <a:cs typeface="Iosevka NFM" panose="02000509030000000004" pitchFamily="49" charset="0"/>
+            </a:endParaRPr>
           </a:p>
         </p:txBody>
       </p:sp>
@@ -7213,8 +7128,8 @@
         </p:nvSpPr>
         <p:spPr>
           <a:xfrm>
-            <a:off x="5623560" y="1133109"/>
-            <a:ext cx="667512" cy="310896"/>
+            <a:off x="8300725" y="1133109"/>
+            <a:ext cx="1080000" cy="310896"/>
           </a:xfrm>
           <a:prstGeom prst="rect">
             <a:avLst/>
@@ -7248,46 +7163,25 @@
           <a:lstStyle/>
           <a:p>
             <a:pPr algn="ctr"/>
-            <a:endParaRPr/>
-          </a:p>
-        </p:txBody>
-      </p:sp>
-      <p:sp>
-        <p:nvSpPr>
-          <p:cNvPr id="20" name="TextBox 19"/>
-          <p:cNvSpPr txBox="1"/>
-          <p:nvPr/>
-        </p:nvSpPr>
-        <p:spPr>
-          <a:xfrm>
-            <a:off x="5623560" y="1133109"/>
-            <a:ext cx="667512" cy="310896"/>
-          </a:xfrm>
-          <a:prstGeom prst="rect">
-            <a:avLst/>
-          </a:prstGeom>
-          <a:noFill/>
-        </p:spPr>
-        <p:txBody>
-          <a:bodyPr wrap="square" lIns="54864" tIns="18288" rIns="54864" bIns="18288" anchor="t">
-            <a:spAutoFit/>
-          </a:bodyPr>
-          <a:lstStyle/>
-          <a:p>
-            <a:pPr algn="ctr">
-              <a:lnSpc>
-                <a:spcPct val="100000"/>
-              </a:lnSpc>
-            </a:pPr>
-            <a:r>
-              <a:rPr sz="800" b="1" i="0">
+            <a:r>
+              <a:rPr lang="en-US" dirty="0">
                 <a:solidFill>
-                  <a:srgbClr val="2B2419"/>
+                  <a:schemeClr val="tx1"/>
                 </a:solidFill>
-                <a:latin typeface="Inter"/>
+                <a:latin typeface="Iosevka NFM" panose="02000509030000000004" pitchFamily="49" charset="0"/>
+                <a:ea typeface="Iosevka NFM" panose="02000509030000000004" pitchFamily="49" charset="0"/>
+                <a:cs typeface="Iosevka NFM" panose="02000509030000000004" pitchFamily="49" charset="0"/>
               </a:rPr>
               <a:t>W6</a:t>
             </a:r>
+            <a:endParaRPr dirty="0">
+              <a:solidFill>
+                <a:schemeClr val="tx1"/>
+              </a:solidFill>
+              <a:latin typeface="Iosevka NFM" panose="02000509030000000004" pitchFamily="49" charset="0"/>
+              <a:ea typeface="Iosevka NFM" panose="02000509030000000004" pitchFamily="49" charset="0"/>
+              <a:cs typeface="Iosevka NFM" panose="02000509030000000004" pitchFamily="49" charset="0"/>
+            </a:endParaRPr>
           </a:p>
         </p:txBody>
       </p:sp>
@@ -7299,8 +7193,8 @@
         </p:nvSpPr>
         <p:spPr>
           <a:xfrm>
-            <a:off x="6318504" y="1133109"/>
-            <a:ext cx="667512" cy="310896"/>
+            <a:off x="9531102" y="1133109"/>
+            <a:ext cx="1080000" cy="310896"/>
           </a:xfrm>
           <a:prstGeom prst="rect">
             <a:avLst/>
@@ -7334,59 +7228,38 @@
           <a:lstStyle/>
           <a:p>
             <a:pPr algn="ctr"/>
-            <a:endParaRPr/>
-          </a:p>
-        </p:txBody>
-      </p:sp>
-      <p:sp>
-        <p:nvSpPr>
-          <p:cNvPr id="22" name="TextBox 21"/>
-          <p:cNvSpPr txBox="1"/>
-          <p:nvPr/>
-        </p:nvSpPr>
-        <p:spPr>
-          <a:xfrm>
-            <a:off x="6318504" y="1133109"/>
-            <a:ext cx="667512" cy="310896"/>
-          </a:xfrm>
-          <a:prstGeom prst="rect">
-            <a:avLst/>
-          </a:prstGeom>
-          <a:noFill/>
-        </p:spPr>
-        <p:txBody>
-          <a:bodyPr wrap="square" lIns="54864" tIns="18288" rIns="54864" bIns="18288" anchor="t">
-            <a:spAutoFit/>
-          </a:bodyPr>
-          <a:lstStyle/>
-          <a:p>
-            <a:pPr algn="ctr">
-              <a:lnSpc>
-                <a:spcPct val="100000"/>
-              </a:lnSpc>
-            </a:pPr>
-            <a:r>
-              <a:rPr sz="800" b="1" i="0">
+            <a:r>
+              <a:rPr lang="en-US" dirty="0">
                 <a:solidFill>
-                  <a:srgbClr val="2B2419"/>
+                  <a:schemeClr val="tx1"/>
                 </a:solidFill>
-                <a:latin typeface="Inter"/>
+                <a:latin typeface="Iosevka NFM" panose="02000509030000000004" pitchFamily="49" charset="0"/>
+                <a:ea typeface="Iosevka NFM" panose="02000509030000000004" pitchFamily="49" charset="0"/>
+                <a:cs typeface="Iosevka NFM" panose="02000509030000000004" pitchFamily="49" charset="0"/>
               </a:rPr>
               <a:t>W7</a:t>
             </a:r>
-          </a:p>
-        </p:txBody>
-      </p:sp>
-      <p:sp>
-        <p:nvSpPr>
-          <p:cNvPr id="23" name="Rectangle 22"/>
+            <a:endParaRPr dirty="0">
+              <a:solidFill>
+                <a:schemeClr val="tx1"/>
+              </a:solidFill>
+              <a:latin typeface="Iosevka NFM" panose="02000509030000000004" pitchFamily="49" charset="0"/>
+              <a:ea typeface="Iosevka NFM" panose="02000509030000000004" pitchFamily="49" charset="0"/>
+              <a:cs typeface="Iosevka NFM" panose="02000509030000000004" pitchFamily="49" charset="0"/>
+            </a:endParaRPr>
+          </a:p>
+        </p:txBody>
+      </p:sp>
+      <p:sp>
+        <p:nvSpPr>
+          <p:cNvPr id="35" name="Rectangle 34"/>
           <p:cNvSpPr/>
           <p:nvPr/>
         </p:nvSpPr>
         <p:spPr>
           <a:xfrm>
-            <a:off x="7013448" y="1133109"/>
-            <a:ext cx="667512" cy="310896"/>
+            <a:off x="10761480" y="1133109"/>
+            <a:ext cx="1080000" cy="310896"/>
           </a:xfrm>
           <a:prstGeom prst="rect">
             <a:avLst/>
@@ -7420,562 +7293,25 @@
           <a:lstStyle/>
           <a:p>
             <a:pPr algn="ctr"/>
-            <a:endParaRPr/>
-          </a:p>
-        </p:txBody>
-      </p:sp>
-      <p:sp>
-        <p:nvSpPr>
-          <p:cNvPr id="24" name="TextBox 23"/>
-          <p:cNvSpPr txBox="1"/>
-          <p:nvPr/>
-        </p:nvSpPr>
-        <p:spPr>
-          <a:xfrm>
-            <a:off x="7013448" y="1133109"/>
-            <a:ext cx="667512" cy="310896"/>
-          </a:xfrm>
-          <a:prstGeom prst="rect">
-            <a:avLst/>
-          </a:prstGeom>
-          <a:noFill/>
-        </p:spPr>
-        <p:txBody>
-          <a:bodyPr wrap="square" lIns="54864" tIns="18288" rIns="54864" bIns="18288" anchor="t">
-            <a:spAutoFit/>
-          </a:bodyPr>
-          <a:lstStyle/>
-          <a:p>
-            <a:pPr algn="ctr">
-              <a:lnSpc>
-                <a:spcPct val="100000"/>
-              </a:lnSpc>
-            </a:pPr>
-            <a:r>
-              <a:rPr sz="800" b="1" i="0">
+            <a:r>
+              <a:rPr lang="en-US" dirty="0">
                 <a:solidFill>
-                  <a:srgbClr val="2B2419"/>
+                  <a:schemeClr val="tx1"/>
                 </a:solidFill>
-                <a:latin typeface="Inter"/>
+                <a:latin typeface="Iosevka NFM" panose="02000509030000000004" pitchFamily="49" charset="0"/>
+                <a:ea typeface="Iosevka NFM" panose="02000509030000000004" pitchFamily="49" charset="0"/>
+                <a:cs typeface="Iosevka NFM" panose="02000509030000000004" pitchFamily="49" charset="0"/>
               </a:rPr>
               <a:t>W8</a:t>
             </a:r>
-          </a:p>
-        </p:txBody>
-      </p:sp>
-      <p:sp>
-        <p:nvSpPr>
-          <p:cNvPr id="25" name="Rectangle 24"/>
-          <p:cNvSpPr/>
-          <p:nvPr/>
-        </p:nvSpPr>
-        <p:spPr>
-          <a:xfrm>
-            <a:off x="7708392" y="1133109"/>
-            <a:ext cx="667512" cy="310896"/>
-          </a:xfrm>
-          <a:prstGeom prst="rect">
-            <a:avLst/>
-          </a:prstGeom>
-          <a:solidFill>
-            <a:srgbClr val="EDE4D3"/>
-          </a:solidFill>
-          <a:ln>
-            <a:solidFill>
-              <a:srgbClr val="D9CDB8"/>
-            </a:solidFill>
-          </a:ln>
-          <a:effectLst/>
-        </p:spPr>
-        <p:style>
-          <a:lnRef idx="1">
-            <a:schemeClr val="accent1"/>
-          </a:lnRef>
-          <a:fillRef idx="3">
-            <a:schemeClr val="accent1"/>
-          </a:fillRef>
-          <a:effectRef idx="2">
-            <a:schemeClr val="accent1"/>
-          </a:effectRef>
-          <a:fontRef idx="minor">
-            <a:schemeClr val="lt1"/>
-          </a:fontRef>
-        </p:style>
-        <p:txBody>
-          <a:bodyPr rtlCol="0" anchor="ctr"/>
-          <a:lstStyle/>
-          <a:p>
-            <a:pPr algn="ctr"/>
-            <a:endParaRPr/>
-          </a:p>
-        </p:txBody>
-      </p:sp>
-      <p:sp>
-        <p:nvSpPr>
-          <p:cNvPr id="26" name="TextBox 25"/>
-          <p:cNvSpPr txBox="1"/>
-          <p:nvPr/>
-        </p:nvSpPr>
-        <p:spPr>
-          <a:xfrm>
-            <a:off x="7708392" y="1133109"/>
-            <a:ext cx="667512" cy="310896"/>
-          </a:xfrm>
-          <a:prstGeom prst="rect">
-            <a:avLst/>
-          </a:prstGeom>
-          <a:noFill/>
-        </p:spPr>
-        <p:txBody>
-          <a:bodyPr wrap="square" lIns="54864" tIns="18288" rIns="54864" bIns="18288" anchor="t">
-            <a:spAutoFit/>
-          </a:bodyPr>
-          <a:lstStyle/>
-          <a:p>
-            <a:pPr algn="ctr">
-              <a:lnSpc>
-                <a:spcPct val="100000"/>
-              </a:lnSpc>
-            </a:pPr>
-            <a:r>
-              <a:rPr sz="800" b="1" i="0">
-                <a:solidFill>
-                  <a:srgbClr val="2B2419"/>
-                </a:solidFill>
-                <a:latin typeface="Inter"/>
-              </a:rPr>
-              <a:t>W9</a:t>
-            </a:r>
-          </a:p>
-        </p:txBody>
-      </p:sp>
-      <p:sp>
-        <p:nvSpPr>
-          <p:cNvPr id="27" name="Rectangle 26"/>
-          <p:cNvSpPr/>
-          <p:nvPr/>
-        </p:nvSpPr>
-        <p:spPr>
-          <a:xfrm>
-            <a:off x="8403336" y="1133109"/>
-            <a:ext cx="667512" cy="310896"/>
-          </a:xfrm>
-          <a:prstGeom prst="rect">
-            <a:avLst/>
-          </a:prstGeom>
-          <a:solidFill>
-            <a:srgbClr val="EDE4D3"/>
-          </a:solidFill>
-          <a:ln>
-            <a:solidFill>
-              <a:srgbClr val="D9CDB8"/>
-            </a:solidFill>
-          </a:ln>
-          <a:effectLst/>
-        </p:spPr>
-        <p:style>
-          <a:lnRef idx="1">
-            <a:schemeClr val="accent1"/>
-          </a:lnRef>
-          <a:fillRef idx="3">
-            <a:schemeClr val="accent1"/>
-          </a:fillRef>
-          <a:effectRef idx="2">
-            <a:schemeClr val="accent1"/>
-          </a:effectRef>
-          <a:fontRef idx="minor">
-            <a:schemeClr val="lt1"/>
-          </a:fontRef>
-        </p:style>
-        <p:txBody>
-          <a:bodyPr rtlCol="0" anchor="ctr"/>
-          <a:lstStyle/>
-          <a:p>
-            <a:pPr algn="ctr"/>
-            <a:endParaRPr/>
-          </a:p>
-        </p:txBody>
-      </p:sp>
-      <p:sp>
-        <p:nvSpPr>
-          <p:cNvPr id="28" name="TextBox 27"/>
-          <p:cNvSpPr txBox="1"/>
-          <p:nvPr/>
-        </p:nvSpPr>
-        <p:spPr>
-          <a:xfrm>
-            <a:off x="8403336" y="1133109"/>
-            <a:ext cx="667512" cy="310896"/>
-          </a:xfrm>
-          <a:prstGeom prst="rect">
-            <a:avLst/>
-          </a:prstGeom>
-          <a:noFill/>
-        </p:spPr>
-        <p:txBody>
-          <a:bodyPr wrap="square" lIns="54864" tIns="18288" rIns="54864" bIns="18288" anchor="t">
-            <a:spAutoFit/>
-          </a:bodyPr>
-          <a:lstStyle/>
-          <a:p>
-            <a:pPr algn="ctr">
-              <a:lnSpc>
-                <a:spcPct val="100000"/>
-              </a:lnSpc>
-            </a:pPr>
-            <a:r>
-              <a:rPr sz="800" b="1" i="0">
-                <a:solidFill>
-                  <a:srgbClr val="2B2419"/>
-                </a:solidFill>
-                <a:latin typeface="Inter"/>
-              </a:rPr>
-              <a:t>W10</a:t>
-            </a:r>
-          </a:p>
-        </p:txBody>
-      </p:sp>
-      <p:sp>
-        <p:nvSpPr>
-          <p:cNvPr id="29" name="Rectangle 28"/>
-          <p:cNvSpPr/>
-          <p:nvPr/>
-        </p:nvSpPr>
-        <p:spPr>
-          <a:xfrm>
-            <a:off x="9098280" y="1133109"/>
-            <a:ext cx="667512" cy="310896"/>
-          </a:xfrm>
-          <a:prstGeom prst="rect">
-            <a:avLst/>
-          </a:prstGeom>
-          <a:solidFill>
-            <a:srgbClr val="EDE4D3"/>
-          </a:solidFill>
-          <a:ln>
-            <a:solidFill>
-              <a:srgbClr val="D9CDB8"/>
-            </a:solidFill>
-          </a:ln>
-          <a:effectLst/>
-        </p:spPr>
-        <p:style>
-          <a:lnRef idx="1">
-            <a:schemeClr val="accent1"/>
-          </a:lnRef>
-          <a:fillRef idx="3">
-            <a:schemeClr val="accent1"/>
-          </a:fillRef>
-          <a:effectRef idx="2">
-            <a:schemeClr val="accent1"/>
-          </a:effectRef>
-          <a:fontRef idx="minor">
-            <a:schemeClr val="lt1"/>
-          </a:fontRef>
-        </p:style>
-        <p:txBody>
-          <a:bodyPr rtlCol="0" anchor="ctr"/>
-          <a:lstStyle/>
-          <a:p>
-            <a:pPr algn="ctr"/>
-            <a:endParaRPr/>
-          </a:p>
-        </p:txBody>
-      </p:sp>
-      <p:sp>
-        <p:nvSpPr>
-          <p:cNvPr id="30" name="TextBox 29"/>
-          <p:cNvSpPr txBox="1"/>
-          <p:nvPr/>
-        </p:nvSpPr>
-        <p:spPr>
-          <a:xfrm>
-            <a:off x="9098280" y="1133109"/>
-            <a:ext cx="667512" cy="310896"/>
-          </a:xfrm>
-          <a:prstGeom prst="rect">
-            <a:avLst/>
-          </a:prstGeom>
-          <a:noFill/>
-        </p:spPr>
-        <p:txBody>
-          <a:bodyPr wrap="square" lIns="54864" tIns="18288" rIns="54864" bIns="18288" anchor="t">
-            <a:spAutoFit/>
-          </a:bodyPr>
-          <a:lstStyle/>
-          <a:p>
-            <a:pPr algn="ctr">
-              <a:lnSpc>
-                <a:spcPct val="100000"/>
-              </a:lnSpc>
-            </a:pPr>
-            <a:r>
-              <a:rPr sz="800" b="1" i="0">
-                <a:solidFill>
-                  <a:srgbClr val="2B2419"/>
-                </a:solidFill>
-                <a:latin typeface="Inter"/>
-              </a:rPr>
-              <a:t>W11</a:t>
-            </a:r>
-          </a:p>
-        </p:txBody>
-      </p:sp>
-      <p:sp>
-        <p:nvSpPr>
-          <p:cNvPr id="31" name="Rectangle 30"/>
-          <p:cNvSpPr/>
-          <p:nvPr/>
-        </p:nvSpPr>
-        <p:spPr>
-          <a:xfrm>
-            <a:off x="9793224" y="1133109"/>
-            <a:ext cx="667512" cy="310896"/>
-          </a:xfrm>
-          <a:prstGeom prst="rect">
-            <a:avLst/>
-          </a:prstGeom>
-          <a:solidFill>
-            <a:srgbClr val="EDE4D3"/>
-          </a:solidFill>
-          <a:ln>
-            <a:solidFill>
-              <a:srgbClr val="D9CDB8"/>
-            </a:solidFill>
-          </a:ln>
-          <a:effectLst/>
-        </p:spPr>
-        <p:style>
-          <a:lnRef idx="1">
-            <a:schemeClr val="accent1"/>
-          </a:lnRef>
-          <a:fillRef idx="3">
-            <a:schemeClr val="accent1"/>
-          </a:fillRef>
-          <a:effectRef idx="2">
-            <a:schemeClr val="accent1"/>
-          </a:effectRef>
-          <a:fontRef idx="minor">
-            <a:schemeClr val="lt1"/>
-          </a:fontRef>
-        </p:style>
-        <p:txBody>
-          <a:bodyPr rtlCol="0" anchor="ctr"/>
-          <a:lstStyle/>
-          <a:p>
-            <a:pPr algn="ctr"/>
-            <a:endParaRPr/>
-          </a:p>
-        </p:txBody>
-      </p:sp>
-      <p:sp>
-        <p:nvSpPr>
-          <p:cNvPr id="32" name="TextBox 31"/>
-          <p:cNvSpPr txBox="1"/>
-          <p:nvPr/>
-        </p:nvSpPr>
-        <p:spPr>
-          <a:xfrm>
-            <a:off x="9793224" y="1133109"/>
-            <a:ext cx="667512" cy="310896"/>
-          </a:xfrm>
-          <a:prstGeom prst="rect">
-            <a:avLst/>
-          </a:prstGeom>
-          <a:noFill/>
-        </p:spPr>
-        <p:txBody>
-          <a:bodyPr wrap="square" lIns="54864" tIns="18288" rIns="54864" bIns="18288" anchor="t">
-            <a:spAutoFit/>
-          </a:bodyPr>
-          <a:lstStyle/>
-          <a:p>
-            <a:pPr algn="ctr">
-              <a:lnSpc>
-                <a:spcPct val="100000"/>
-              </a:lnSpc>
-            </a:pPr>
-            <a:r>
-              <a:rPr sz="800" b="1" i="0">
-                <a:solidFill>
-                  <a:srgbClr val="2B2419"/>
-                </a:solidFill>
-                <a:latin typeface="Inter"/>
-              </a:rPr>
-              <a:t>W12</a:t>
-            </a:r>
-          </a:p>
-        </p:txBody>
-      </p:sp>
-      <p:sp>
-        <p:nvSpPr>
-          <p:cNvPr id="33" name="Rectangle 32"/>
-          <p:cNvSpPr/>
-          <p:nvPr/>
-        </p:nvSpPr>
-        <p:spPr>
-          <a:xfrm>
-            <a:off x="10488168" y="1133109"/>
-            <a:ext cx="667512" cy="310896"/>
-          </a:xfrm>
-          <a:prstGeom prst="rect">
-            <a:avLst/>
-          </a:prstGeom>
-          <a:solidFill>
-            <a:srgbClr val="EDE4D3"/>
-          </a:solidFill>
-          <a:ln>
-            <a:solidFill>
-              <a:srgbClr val="D9CDB8"/>
-            </a:solidFill>
-          </a:ln>
-          <a:effectLst/>
-        </p:spPr>
-        <p:style>
-          <a:lnRef idx="1">
-            <a:schemeClr val="accent1"/>
-          </a:lnRef>
-          <a:fillRef idx="3">
-            <a:schemeClr val="accent1"/>
-          </a:fillRef>
-          <a:effectRef idx="2">
-            <a:schemeClr val="accent1"/>
-          </a:effectRef>
-          <a:fontRef idx="minor">
-            <a:schemeClr val="lt1"/>
-          </a:fontRef>
-        </p:style>
-        <p:txBody>
-          <a:bodyPr rtlCol="0" anchor="ctr"/>
-          <a:lstStyle/>
-          <a:p>
-            <a:pPr algn="ctr"/>
-            <a:endParaRPr/>
-          </a:p>
-        </p:txBody>
-      </p:sp>
-      <p:sp>
-        <p:nvSpPr>
-          <p:cNvPr id="34" name="TextBox 33"/>
-          <p:cNvSpPr txBox="1"/>
-          <p:nvPr/>
-        </p:nvSpPr>
-        <p:spPr>
-          <a:xfrm>
-            <a:off x="10488168" y="1133109"/>
-            <a:ext cx="667512" cy="310896"/>
-          </a:xfrm>
-          <a:prstGeom prst="rect">
-            <a:avLst/>
-          </a:prstGeom>
-          <a:noFill/>
-        </p:spPr>
-        <p:txBody>
-          <a:bodyPr wrap="square" lIns="54864" tIns="18288" rIns="54864" bIns="18288" anchor="t">
-            <a:spAutoFit/>
-          </a:bodyPr>
-          <a:lstStyle/>
-          <a:p>
-            <a:pPr algn="ctr">
-              <a:lnSpc>
-                <a:spcPct val="100000"/>
-              </a:lnSpc>
-            </a:pPr>
-            <a:r>
-              <a:rPr sz="800" b="1" i="0">
-                <a:solidFill>
-                  <a:srgbClr val="2B2419"/>
-                </a:solidFill>
-                <a:latin typeface="Inter"/>
-              </a:rPr>
-              <a:t>W13</a:t>
-            </a:r>
-          </a:p>
-        </p:txBody>
-      </p:sp>
-      <p:sp>
-        <p:nvSpPr>
-          <p:cNvPr id="35" name="Rectangle 34"/>
-          <p:cNvSpPr/>
-          <p:nvPr/>
-        </p:nvSpPr>
-        <p:spPr>
-          <a:xfrm>
-            <a:off x="11183112" y="1133109"/>
-            <a:ext cx="667512" cy="310896"/>
-          </a:xfrm>
-          <a:prstGeom prst="rect">
-            <a:avLst/>
-          </a:prstGeom>
-          <a:solidFill>
-            <a:srgbClr val="EDE4D3"/>
-          </a:solidFill>
-          <a:ln>
-            <a:solidFill>
-              <a:srgbClr val="D9CDB8"/>
-            </a:solidFill>
-          </a:ln>
-          <a:effectLst/>
-        </p:spPr>
-        <p:style>
-          <a:lnRef idx="1">
-            <a:schemeClr val="accent1"/>
-          </a:lnRef>
-          <a:fillRef idx="3">
-            <a:schemeClr val="accent1"/>
-          </a:fillRef>
-          <a:effectRef idx="2">
-            <a:schemeClr val="accent1"/>
-          </a:effectRef>
-          <a:fontRef idx="minor">
-            <a:schemeClr val="lt1"/>
-          </a:fontRef>
-        </p:style>
-        <p:txBody>
-          <a:bodyPr rtlCol="0" anchor="ctr"/>
-          <a:lstStyle/>
-          <a:p>
-            <a:pPr algn="ctr"/>
-            <a:endParaRPr/>
-          </a:p>
-        </p:txBody>
-      </p:sp>
-      <p:sp>
-        <p:nvSpPr>
-          <p:cNvPr id="36" name="TextBox 35"/>
-          <p:cNvSpPr txBox="1"/>
-          <p:nvPr/>
-        </p:nvSpPr>
-        <p:spPr>
-          <a:xfrm>
-            <a:off x="11183112" y="1133109"/>
-            <a:ext cx="667512" cy="310896"/>
-          </a:xfrm>
-          <a:prstGeom prst="rect">
-            <a:avLst/>
-          </a:prstGeom>
-          <a:noFill/>
-        </p:spPr>
-        <p:txBody>
-          <a:bodyPr wrap="square" lIns="54864" tIns="18288" rIns="54864" bIns="18288" anchor="t">
-            <a:spAutoFit/>
-          </a:bodyPr>
-          <a:lstStyle/>
-          <a:p>
-            <a:pPr algn="ctr">
-              <a:lnSpc>
-                <a:spcPct val="100000"/>
-              </a:lnSpc>
-            </a:pPr>
-            <a:r>
-              <a:rPr sz="800" b="1" i="0">
-                <a:solidFill>
-                  <a:srgbClr val="2B2419"/>
-                </a:solidFill>
-                <a:latin typeface="Inter"/>
-              </a:rPr>
-              <a:t>W14</a:t>
-            </a:r>
+            <a:endParaRPr dirty="0">
+              <a:solidFill>
+                <a:schemeClr val="tx1"/>
+              </a:solidFill>
+              <a:latin typeface="Iosevka NFM" panose="02000509030000000004" pitchFamily="49" charset="0"/>
+              <a:ea typeface="Iosevka NFM" panose="02000509030000000004" pitchFamily="49" charset="0"/>
+              <a:cs typeface="Iosevka NFM" panose="02000509030000000004" pitchFamily="49" charset="0"/>
+            </a:endParaRPr>
           </a:p>
         </p:txBody>
       </p:sp>
@@ -15281,7 +14617,7 @@
         <p:spPr>
           <a:xfrm>
             <a:off x="640080" y="402336"/>
-            <a:ext cx="10972800" cy="713232"/>
+            <a:ext cx="10972800" cy="467820"/>
           </a:xfrm>
           <a:prstGeom prst="rect">
             <a:avLst/>
@@ -15300,9 +14636,9 @@
               </a:lnSpc>
             </a:pPr>
             <a:r>
-              <a:rPr sz="2800" b="1" i="0">
+              <a:rPr sz="2800" b="1" i="0" dirty="0">
                 <a:solidFill>
-                  <a:srgbClr val="8C5A2E"/>
+                  <a:srgbClr val="2B2418"/>
                 </a:solidFill>
                 <a:latin typeface="Playfair Display"/>
               </a:rPr>
@@ -19298,14 +18634,14 @@
           <p:nvPr>
             <p:extLst>
               <p:ext uri="{D42A27DB-BD31-4B8C-83A1-F6EECF244321}">
-                <p14:modId xmlns:p14="http://schemas.microsoft.com/office/powerpoint/2010/main" val="2701082320"/>
+                <p14:modId xmlns:p14="http://schemas.microsoft.com/office/powerpoint/2010/main" val="4236172087"/>
               </p:ext>
             </p:extLst>
           </p:nvPr>
         </p:nvGraphicFramePr>
         <p:xfrm>
-          <a:off x="640080" y="1095048"/>
-          <a:ext cx="6811044" cy="5242386"/>
+          <a:off x="640079" y="1095048"/>
+          <a:ext cx="7060885" cy="5242386"/>
         </p:xfrm>
         <a:graphic>
           <a:graphicData uri="http://schemas.openxmlformats.org/drawingml/2006/table">
@@ -19314,28 +18650,28 @@
                 <a:tableStyleId>{5C22544A-7EE6-4342-B048-85BDC9FD1C3A}</a:tableStyleId>
               </a:tblPr>
               <a:tblGrid>
-                <a:gridCol w="589613">
+                <a:gridCol w="611241">
                   <a:extLst>
                     <a:ext uri="{9D8B030D-6E8A-4147-A177-3AD203B41FA5}">
                       <a16:colId xmlns:a16="http://schemas.microsoft.com/office/drawing/2014/main" val="20000"/>
                     </a:ext>
                   </a:extLst>
                 </a:gridCol>
-                <a:gridCol w="3456351">
+                <a:gridCol w="3583136">
                   <a:extLst>
                     <a:ext uri="{9D8B030D-6E8A-4147-A177-3AD203B41FA5}">
                       <a16:colId xmlns:a16="http://schemas.microsoft.com/office/drawing/2014/main" val="20001"/>
                     </a:ext>
                   </a:extLst>
                 </a:gridCol>
-                <a:gridCol w="731933">
+                <a:gridCol w="758782">
                   <a:extLst>
                     <a:ext uri="{9D8B030D-6E8A-4147-A177-3AD203B41FA5}">
                       <a16:colId xmlns:a16="http://schemas.microsoft.com/office/drawing/2014/main" val="20002"/>
                     </a:ext>
                   </a:extLst>
                 </a:gridCol>
-                <a:gridCol w="2033147">
+                <a:gridCol w="2107726">
                   <a:extLst>
                     <a:ext uri="{9D8B030D-6E8A-4147-A177-3AD203B41FA5}">
                       <a16:colId xmlns:a16="http://schemas.microsoft.com/office/drawing/2014/main" val="20003"/>
@@ -19701,7 +19037,7 @@
                     <a:lstStyle/>
                     <a:p>
                       <a:r>
-                        <a:rPr sz="1300" b="0">
+                        <a:rPr sz="1300" b="0" dirty="0">
                           <a:solidFill>
                             <a:srgbClr val="2B2419"/>
                           </a:solidFill>
@@ -19986,7 +19322,7 @@
                     <a:lstStyle/>
                     <a:p>
                       <a:r>
-                        <a:rPr sz="1300" b="0">
+                        <a:rPr sz="1300" b="0" dirty="0">
                           <a:solidFill>
                             <a:srgbClr val="2B2419"/>
                           </a:solidFill>
@@ -20110,7 +19446,7 @@
                     <a:lstStyle/>
                     <a:p>
                       <a:r>
-                        <a:rPr sz="1300" b="0">
+                        <a:rPr sz="1300" b="0" dirty="0">
                           <a:solidFill>
                             <a:srgbClr val="2B2419"/>
                           </a:solidFill>
@@ -37288,7 +36624,7 @@
               </a:lnSpc>
             </a:pPr>
             <a:r>
-              <a:rPr sz="2800" b="1" i="0">
+              <a:rPr sz="2800" b="1" i="0" dirty="0">
                 <a:solidFill>
                   <a:srgbClr val="2B2419"/>
                 </a:solidFill>
@@ -37452,40 +36788,13 @@
           <a:bodyPr rtlCol="0" anchor="ctr"/>
           <a:lstStyle/>
           <a:p>
-            <a:pPr algn="ctr"/>
-            <a:endParaRPr/>
-          </a:p>
-        </p:txBody>
-      </p:sp>
-      <p:sp>
-        <p:nvSpPr>
-          <p:cNvPr id="9" name="TextBox 8"/>
-          <p:cNvSpPr txBox="1"/>
-          <p:nvPr/>
-        </p:nvSpPr>
-        <p:spPr>
-          <a:xfrm>
-            <a:off x="640080" y="1417320"/>
-            <a:ext cx="3474720" cy="402336"/>
-          </a:xfrm>
-          <a:prstGeom prst="rect">
-            <a:avLst/>
-          </a:prstGeom>
-          <a:noFill/>
-        </p:spPr>
-        <p:txBody>
-          <a:bodyPr wrap="square" lIns="54864" tIns="18288" rIns="54864" bIns="18288" anchor="t">
-            <a:spAutoFit/>
-          </a:bodyPr>
-          <a:lstStyle/>
-          <a:p>
             <a:pPr algn="ctr">
               <a:lnSpc>
                 <a:spcPct val="100000"/>
               </a:lnSpc>
             </a:pPr>
             <a:r>
-              <a:rPr sz="1200" b="1" i="0">
+              <a:rPr lang="en-US" b="1" dirty="0">
                 <a:solidFill>
                   <a:srgbClr val="FFFFFF"/>
                 </a:solidFill>
@@ -37786,40 +37095,13 @@
           <a:bodyPr rtlCol="0" anchor="ctr"/>
           <a:lstStyle/>
           <a:p>
-            <a:pPr algn="ctr"/>
-            <a:endParaRPr/>
-          </a:p>
-        </p:txBody>
-      </p:sp>
-      <p:sp>
-        <p:nvSpPr>
-          <p:cNvPr id="17" name="TextBox 16"/>
-          <p:cNvSpPr txBox="1"/>
-          <p:nvPr/>
-        </p:nvSpPr>
-        <p:spPr>
-          <a:xfrm>
-            <a:off x="4297680" y="1417320"/>
-            <a:ext cx="3474720" cy="402336"/>
-          </a:xfrm>
-          <a:prstGeom prst="rect">
-            <a:avLst/>
-          </a:prstGeom>
-          <a:noFill/>
-        </p:spPr>
-        <p:txBody>
-          <a:bodyPr wrap="square" lIns="54864" tIns="18288" rIns="54864" bIns="18288" anchor="t">
-            <a:spAutoFit/>
-          </a:bodyPr>
-          <a:lstStyle/>
-          <a:p>
             <a:pPr algn="ctr">
               <a:lnSpc>
                 <a:spcPct val="100000"/>
               </a:lnSpc>
             </a:pPr>
             <a:r>
-              <a:rPr sz="1200" b="1" i="0">
+              <a:rPr lang="en-US" b="1" dirty="0">
                 <a:solidFill>
                   <a:srgbClr val="FFFFFF"/>
                 </a:solidFill>
@@ -38120,40 +37402,13 @@
           <a:bodyPr rtlCol="0" anchor="ctr"/>
           <a:lstStyle/>
           <a:p>
-            <a:pPr algn="ctr"/>
-            <a:endParaRPr/>
-          </a:p>
-        </p:txBody>
-      </p:sp>
-      <p:sp>
-        <p:nvSpPr>
-          <p:cNvPr id="25" name="TextBox 24"/>
-          <p:cNvSpPr txBox="1"/>
-          <p:nvPr/>
-        </p:nvSpPr>
-        <p:spPr>
-          <a:xfrm>
-            <a:off x="7955279" y="1417320"/>
-            <a:ext cx="3474720" cy="402336"/>
-          </a:xfrm>
-          <a:prstGeom prst="rect">
-            <a:avLst/>
-          </a:prstGeom>
-          <a:noFill/>
-        </p:spPr>
-        <p:txBody>
-          <a:bodyPr wrap="square" lIns="54864" tIns="18288" rIns="54864" bIns="18288" anchor="t">
-            <a:spAutoFit/>
-          </a:bodyPr>
-          <a:lstStyle/>
-          <a:p>
             <a:pPr algn="ctr">
               <a:lnSpc>
                 <a:spcPct val="100000"/>
               </a:lnSpc>
             </a:pPr>
             <a:r>
-              <a:rPr sz="1200" b="1" i="0">
+              <a:rPr lang="en-US" b="1" dirty="0">
                 <a:solidFill>
                   <a:srgbClr val="FFFFFF"/>
                 </a:solidFill>
@@ -45595,7 +44850,7 @@
               </a:lnSpc>
             </a:pPr>
             <a:r>
-              <a:rPr sz="2800" b="1" i="0">
+              <a:rPr sz="2800" b="1" i="0" dirty="0">
                 <a:solidFill>
                   <a:srgbClr val="2B2419"/>
                 </a:solidFill>
@@ -46075,7 +45330,7 @@
               </a:lnSpc>
             </a:pPr>
             <a:r>
-              <a:rPr sz="800" b="1" i="0">
+              <a:rPr sz="800" b="1" i="0" dirty="0">
                 <a:solidFill>
                   <a:srgbClr val="8C5A2E"/>
                 </a:solidFill>
@@ -48323,7 +47578,7 @@
         <p:spPr>
           <a:xfrm>
             <a:off x="6104241" y="1888236"/>
-            <a:ext cx="5760720" cy="347472"/>
+            <a:ext cx="5760720" cy="236988"/>
           </a:xfrm>
           <a:prstGeom prst="rect">
             <a:avLst/>
@@ -48342,14 +47597,29 @@
               </a:lnSpc>
             </a:pPr>
             <a:r>
-              <a:rPr sz="1300" b="1" i="0">
+              <a:rPr sz="1300" b="1" i="0" dirty="0">
                 <a:solidFill>
                   <a:srgbClr val="2B2419"/>
                 </a:solidFill>
                 <a:latin typeface="Playfair Display"/>
               </a:rPr>
-              <a:t>WBS Level 3 Hours</a:t>
-            </a:r>
+              <a:t>WBS Leve</a:t>
+            </a:r>
+            <a:r>
+              <a:rPr lang="en-US" sz="1300" b="1" i="0" dirty="0">
+                <a:solidFill>
+                  <a:srgbClr val="2B2419"/>
+                </a:solidFill>
+                <a:latin typeface="Playfair Display"/>
+              </a:rPr>
+              <a:t>l</a:t>
+            </a:r>
+            <a:endParaRPr sz="1300" b="1" i="0" dirty="0">
+              <a:solidFill>
+                <a:srgbClr val="2B2419"/>
+              </a:solidFill>
+              <a:latin typeface="Playfair Display"/>
+            </a:endParaRPr>
           </a:p>
         </p:txBody>
       </p:sp>
